--- a/media/resources/BirOrunduuOnduktar/Onduktar_Kemituu3Tutashtyr.pptx
+++ b/media/resources/BirOrunduuOnduktar/Onduktar_Kemituu3Tutashtyr.pptx
@@ -7318,7 +7318,7 @@
                 <a:ea typeface="+mn-ea"/>
                 <a:cs typeface="+mn-cs"/>
               </a:rPr>
-              <a:t>Ошол команда үчүн квадратты талап кылуу үчүн жооп кутучасынын тиешелүү көлөкө тарабын чыкылдатыңыз/тийиңиз.</a:t>
+              <a:t>Ошол команданын квадратын ээлөө үчүн жооп кутучасынын боёлгон бөлүгүн басыңыз.</a:t>
             </a:r>
           </a:p>
           <a:p>
@@ -7951,7 +7951,7 @@
                             <a:schemeClr val="tx1"/>
                           </a:solidFill>
                         </a:rPr>
-                        <a:t>3.8</a:t>
+                        <a:t>3,8</a:t>
                       </a:r>
                     </a:p>
                   </a:txBody>
@@ -8023,7 +8023,7 @@
                             <a:schemeClr val="tx1"/>
                           </a:solidFill>
                         </a:rPr>
-                        <a:t>2.2</a:t>
+                        <a:t>2,2</a:t>
                       </a:r>
                     </a:p>
                   </a:txBody>
@@ -8095,7 +8095,7 @@
                             <a:schemeClr val="tx1"/>
                           </a:solidFill>
                         </a:rPr>
-                        <a:t>1.4</a:t>
+                        <a:t>1,4</a:t>
                       </a:r>
                     </a:p>
                   </a:txBody>
@@ -8151,7 +8151,7 @@
                             <a:schemeClr val="tx1"/>
                           </a:solidFill>
                         </a:rPr>
-                        <a:t>2.1</a:t>
+                        <a:t>2,1</a:t>
                       </a:r>
                     </a:p>
                   </a:txBody>
@@ -8214,7 +8214,7 @@
                             <a:schemeClr val="tx1"/>
                           </a:solidFill>
                         </a:rPr>
-                        <a:t>1.5</a:t>
+                        <a:t>1,5</a:t>
                       </a:r>
                     </a:p>
                   </a:txBody>
@@ -8270,7 +8270,7 @@
                             <a:schemeClr val="tx1"/>
                           </a:solidFill>
                         </a:rPr>
-                        <a:t>0.4</a:t>
+                        <a:t>0,4</a:t>
                       </a:r>
                     </a:p>
                   </a:txBody>
@@ -8342,7 +8342,7 @@
                             <a:schemeClr val="tx1"/>
                           </a:solidFill>
                         </a:rPr>
-                        <a:t>3.7</a:t>
+                        <a:t>3,7</a:t>
                       </a:r>
                     </a:p>
                   </a:txBody>
@@ -8398,7 +8398,7 @@
                             <a:schemeClr val="tx1"/>
                           </a:solidFill>
                         </a:rPr>
-                        <a:t>1.7</a:t>
+                        <a:t>1,7</a:t>
                       </a:r>
                     </a:p>
                   </a:txBody>
@@ -8461,7 +8461,7 @@
                             <a:schemeClr val="tx1"/>
                           </a:solidFill>
                         </a:rPr>
-                        <a:t>0.6</a:t>
+                        <a:t>0,6</a:t>
                       </a:r>
                     </a:p>
                   </a:txBody>
@@ -8517,7 +8517,7 @@
                             <a:schemeClr val="tx1"/>
                           </a:solidFill>
                         </a:rPr>
-                        <a:t>0.1</a:t>
+                        <a:t>0,1</a:t>
                       </a:r>
                     </a:p>
                   </a:txBody>
@@ -8589,7 +8589,7 @@
                             <a:schemeClr val="tx1"/>
                           </a:solidFill>
                         </a:rPr>
-                        <a:t>1.8</a:t>
+                        <a:t>1,8</a:t>
                       </a:r>
                     </a:p>
                   </a:txBody>
@@ -8708,7 +8708,7 @@
                             <a:schemeClr val="tx1"/>
                           </a:solidFill>
                         </a:rPr>
-                        <a:t>0.2</a:t>
+                        <a:t>0,2</a:t>
                       </a:r>
                     </a:p>
                   </a:txBody>
@@ -8764,7 +8764,7 @@
                             <a:schemeClr val="tx1"/>
                           </a:solidFill>
                         </a:rPr>
-                        <a:t>1.9</a:t>
+                        <a:t>1,9</a:t>
                       </a:r>
                     </a:p>
                   </a:txBody>
@@ -8836,7 +8836,7 @@
                             <a:schemeClr val="tx1"/>
                           </a:solidFill>
                         </a:rPr>
-                        <a:t>0.5</a:t>
+                        <a:t>0,5</a:t>
                       </a:r>
                     </a:p>
                   </a:txBody>
@@ -8892,7 +8892,7 @@
                             <a:schemeClr val="tx1"/>
                           </a:solidFill>
                         </a:rPr>
-                        <a:t>1.3</a:t>
+                        <a:t>1,3</a:t>
                       </a:r>
                     </a:p>
                   </a:txBody>
@@ -9461,7 +9461,7 @@
                           <a:latin typeface="Arial" panose="020B0604020202020204" pitchFamily="34" charset="0"/>
                           <a:cs typeface="Arial" panose="020B0604020202020204" pitchFamily="34" charset="0"/>
                         </a:rPr>
-                        <a:t>5.5 – 3.5</a:t>
+                        <a:t>5,5 – 3,5</a:t>
                       </a:r>
                     </a:p>
                   </a:txBody>
@@ -9518,7 +9518,7 @@
                           <a:latin typeface="Arial" panose="020B0604020202020204" pitchFamily="34" charset="0"/>
                           <a:cs typeface="Arial" panose="020B0604020202020204" pitchFamily="34" charset="0"/>
                         </a:rPr>
-                        <a:t>4 – 2.7</a:t>
+                        <a:t>4 – 2,7</a:t>
                       </a:r>
                     </a:p>
                   </a:txBody>
@@ -9582,7 +9582,7 @@
                           <a:latin typeface="Arial" panose="020B0604020202020204" pitchFamily="34" charset="0"/>
                           <a:cs typeface="Arial" panose="020B0604020202020204" pitchFamily="34" charset="0"/>
                         </a:rPr>
-                        <a:t>2 – 1.8</a:t>
+                        <a:t>2 – 1,8</a:t>
                       </a:r>
                     </a:p>
                   </a:txBody>
@@ -9639,7 +9639,7 @@
                           <a:latin typeface="Arial" panose="020B0604020202020204" pitchFamily="34" charset="0"/>
                           <a:cs typeface="Arial" panose="020B0604020202020204" pitchFamily="34" charset="0"/>
                         </a:rPr>
-                        <a:t>4.5 – 2.6</a:t>
+                        <a:t>4,5 – 2,6</a:t>
                       </a:r>
                     </a:p>
                   </a:txBody>
@@ -9703,7 +9703,7 @@
                           <a:latin typeface="Arial" panose="020B0604020202020204" pitchFamily="34" charset="0"/>
                           <a:cs typeface="Arial" panose="020B0604020202020204" pitchFamily="34" charset="0"/>
                         </a:rPr>
-                        <a:t>4.3 – 3.8</a:t>
+                        <a:t>4,3 – 3,8</a:t>
                       </a:r>
                     </a:p>
                   </a:txBody>
@@ -9760,7 +9760,7 @@
                           <a:latin typeface="Arial" panose="020B0604020202020204" pitchFamily="34" charset="0"/>
                           <a:cs typeface="Arial" panose="020B0604020202020204" pitchFamily="34" charset="0"/>
                         </a:rPr>
-                        <a:t>6 – 2.2</a:t>
+                        <a:t>6 – 2,2</a:t>
                       </a:r>
                     </a:p>
                   </a:txBody>
@@ -9824,7 +9824,7 @@
                           <a:latin typeface="Arial" panose="020B0604020202020204" pitchFamily="34" charset="0"/>
                           <a:cs typeface="Arial" panose="020B0604020202020204" pitchFamily="34" charset="0"/>
                         </a:rPr>
-                        <a:t>5 – 3.2</a:t>
+                        <a:t>5 – 3,2</a:t>
                       </a:r>
                     </a:p>
                   </a:txBody>
@@ -9881,7 +9881,7 @@
                           <a:latin typeface="Arial" panose="020B0604020202020204" pitchFamily="34" charset="0"/>
                           <a:cs typeface="Arial" panose="020B0604020202020204" pitchFamily="34" charset="0"/>
                         </a:rPr>
-                        <a:t>3.7 – 1.5</a:t>
+                        <a:t>3,7 – 1,5</a:t>
                       </a:r>
                     </a:p>
                   </a:txBody>
@@ -9945,7 +9945,7 @@
                           <a:latin typeface="Arial" panose="020B0604020202020204" pitchFamily="34" charset="0"/>
                           <a:cs typeface="Arial" panose="020B0604020202020204" pitchFamily="34" charset="0"/>
                         </a:rPr>
-                        <a:t>3.8 – 2.1</a:t>
+                        <a:t>3,8 – 2,1</a:t>
                       </a:r>
                     </a:p>
                   </a:txBody>
@@ -10002,7 +10002,7 @@
                           <a:latin typeface="Arial" panose="020B0604020202020204" pitchFamily="34" charset="0"/>
                           <a:cs typeface="Arial" panose="020B0604020202020204" pitchFamily="34" charset="0"/>
                         </a:rPr>
-                        <a:t>5.8 – 2.1</a:t>
+                        <a:t>5,8 – 2,1</a:t>
                       </a:r>
                     </a:p>
                   </a:txBody>
@@ -10066,7 +10066,7 @@
                           <a:latin typeface="Arial" panose="020B0604020202020204" pitchFamily="34" charset="0"/>
                           <a:cs typeface="Arial" panose="020B0604020202020204" pitchFamily="34" charset="0"/>
                         </a:rPr>
-                        <a:t>4.3 – 4.2</a:t>
+                        <a:t>4,3 – 4,2</a:t>
                       </a:r>
                     </a:p>
                   </a:txBody>
@@ -10123,7 +10123,7 @@
                           <a:latin typeface="Arial" panose="020B0604020202020204" pitchFamily="34" charset="0"/>
                           <a:cs typeface="Arial" panose="020B0604020202020204" pitchFamily="34" charset="0"/>
                         </a:rPr>
-                        <a:t>3.4 – 2</a:t>
+                        <a:t>3,4 – 2</a:t>
                       </a:r>
                     </a:p>
                   </a:txBody>
@@ -10187,7 +10187,7 @@
                           <a:latin typeface="Arial" panose="020B0604020202020204" pitchFamily="34" charset="0"/>
                           <a:cs typeface="Arial" panose="020B0604020202020204" pitchFamily="34" charset="0"/>
                         </a:rPr>
-                        <a:t>4 – 1.9</a:t>
+                        <a:t>4 – 1,9</a:t>
                       </a:r>
                     </a:p>
                   </a:txBody>
@@ -10244,7 +10244,7 @@
                           <a:latin typeface="Arial" panose="020B0604020202020204" pitchFamily="34" charset="0"/>
                           <a:cs typeface="Arial" panose="020B0604020202020204" pitchFamily="34" charset="0"/>
                         </a:rPr>
-                        <a:t>6.2 – 4.7</a:t>
+                        <a:t>6,2 – 4,7</a:t>
                       </a:r>
                     </a:p>
                   </a:txBody>
@@ -10308,7 +10308,7 @@
                           <a:latin typeface="Arial" panose="020B0604020202020204" pitchFamily="34" charset="0"/>
                           <a:cs typeface="Arial" panose="020B0604020202020204" pitchFamily="34" charset="0"/>
                         </a:rPr>
-                        <a:t>6.2 – 5.6</a:t>
+                        <a:t>6,2 – 5,6</a:t>
                       </a:r>
                     </a:p>
                   </a:txBody>
@@ -10365,7 +10365,7 @@
                           <a:latin typeface="Arial" panose="020B0604020202020204" pitchFamily="34" charset="0"/>
                           <a:cs typeface="Arial" panose="020B0604020202020204" pitchFamily="34" charset="0"/>
                         </a:rPr>
-                        <a:t>2.2 – 1.8</a:t>
+                        <a:t>2,2 – 1,8</a:t>
                       </a:r>
                     </a:p>
                   </a:txBody>
@@ -21038,7 +21038,7 @@
             </a:pPr>
             <a:r>
               <a:rPr lang="ru-RU" dirty="0"/>
-              <a:t>Турдуу пикирлер учун ыраазычылык билдиребиз.</a:t>
+              <a:t>Турдуу пикирлер үчүн ыраазычылык билдиребиз.</a:t>
             </a:r>
           </a:p>
           <a:p>
